--- a/templates/posts/october/2026-10-01-thu-ig-boubacar.pptx
+++ b/templates/posts/october/2026-10-01-thu-ig-boubacar.pptx
@@ -4219,92 +4219,33 @@
           </a:p>
         </p:txBody>
       </p:sp>
-      <p:sp>
-        <p:nvSpPr>
-          <p:cNvPr id="10" name="Oval 9"/>
-          <p:cNvSpPr/>
+      <p:pic>
+        <p:nvPicPr>
+          <p:cNvPr id="10" name="Picture 9" descr="foundation-logo-white.png"/>
+          <p:cNvPicPr>
+            <a:picLocks noChangeAspect="1"/>
+          </p:cNvPicPr>
           <p:nvPr/>
-        </p:nvSpPr>
-        <p:spPr>
-          <a:xfrm>
-            <a:off x="8667750" y="11239500"/>
-            <a:ext cx="857250" cy="857250"/>
-          </a:xfrm>
-          <a:prstGeom prst="ellipse">
-            <a:avLst/>
-          </a:prstGeom>
-          <a:noFill/>
-          <a:ln w="19050">
-            <a:solidFill>
-              <a:srgbClr val="F4F1EA"/>
-            </a:solidFill>
-          </a:ln>
-          <a:effectLst/>
-        </p:spPr>
-        <p:style>
-          <a:lnRef idx="1">
-            <a:schemeClr val="accent1"/>
-          </a:lnRef>
-          <a:fillRef idx="3">
-            <a:schemeClr val="accent1"/>
-          </a:fillRef>
-          <a:effectRef idx="2">
-            <a:schemeClr val="accent1"/>
-          </a:effectRef>
-          <a:fontRef idx="minor">
-            <a:schemeClr val="lt1"/>
-          </a:fontRef>
-        </p:style>
-        <p:txBody>
-          <a:bodyPr rtlCol="0" anchor="ctr"/>
-          <a:lstStyle/>
-          <a:p>
-            <a:pPr algn="ctr"/>
-          </a:p>
-        </p:txBody>
-      </p:sp>
-      <p:sp>
-        <p:nvSpPr>
-          <p:cNvPr id="11" name="TextBox 10"/>
-          <p:cNvSpPr txBox="1"/>
-          <p:nvPr/>
-        </p:nvSpPr>
-        <p:spPr>
-          <a:xfrm>
-            <a:off x="8667750" y="11239500"/>
-            <a:ext cx="857250" cy="857250"/>
+        </p:nvPicPr>
+        <p:blipFill>
+          <a:blip r:embed="rId3"/>
+          <a:stretch>
+            <a:fillRect/>
+          </a:stretch>
+        </p:blipFill>
+        <p:spPr>
+          <a:xfrm>
+            <a:off x="8571501" y="11239500"/>
+            <a:ext cx="953498" cy="857250"/>
           </a:xfrm>
           <a:prstGeom prst="rect">
             <a:avLst/>
           </a:prstGeom>
-          <a:noFill/>
-        </p:spPr>
-        <p:txBody>
-          <a:bodyPr wrap="square" lIns="0" rIns="0" tIns="0" bIns="0" anchor="ctr">
-            <a:spAutoFit/>
-          </a:bodyPr>
-          <a:lstStyle/>
-          <a:p>
-            <a:pPr algn="ctr">
-              <a:lnSpc>
-                <a:spcPct val="120000"/>
-              </a:lnSpc>
-            </a:pPr>
-            <a:r>
-              <a:rPr sz="1800" b="1" i="0">
-                <a:solidFill>
-                  <a:srgbClr val="F4F1EA"/>
-                </a:solidFill>
-                <a:latin typeface="Montserrat"/>
-              </a:rPr>
-              <a:t>LOGO</a:t>
-            </a:r>
-          </a:p>
-        </p:txBody>
-      </p:sp>
-      <p:sp>
-        <p:nvSpPr>
-          <p:cNvPr id="12" name="TextBox 11"/>
+        </p:spPr>
+      </p:pic>
+      <p:sp>
+        <p:nvSpPr>
+          <p:cNvPr id="11" name="TextBox 10"/>
           <p:cNvSpPr txBox="1"/>
           <p:nvPr/>
         </p:nvSpPr>
@@ -5443,92 +5384,33 @@
           </a:p>
         </p:txBody>
       </p:sp>
-      <p:sp>
-        <p:nvSpPr>
-          <p:cNvPr id="7" name="Oval 6"/>
-          <p:cNvSpPr/>
+      <p:pic>
+        <p:nvPicPr>
+          <p:cNvPr id="7" name="Picture 6" descr="foundation-logo-color.png"/>
+          <p:cNvPicPr>
+            <a:picLocks noChangeAspect="1"/>
+          </p:cNvPicPr>
           <p:nvPr/>
-        </p:nvSpPr>
-        <p:spPr>
-          <a:xfrm>
-            <a:off x="8667750" y="11239500"/>
-            <a:ext cx="857250" cy="857250"/>
-          </a:xfrm>
-          <a:prstGeom prst="ellipse">
-            <a:avLst/>
-          </a:prstGeom>
-          <a:noFill/>
-          <a:ln w="19050">
-            <a:solidFill>
-              <a:srgbClr val="22371F"/>
-            </a:solidFill>
-          </a:ln>
-          <a:effectLst/>
-        </p:spPr>
-        <p:style>
-          <a:lnRef idx="1">
-            <a:schemeClr val="accent1"/>
-          </a:lnRef>
-          <a:fillRef idx="3">
-            <a:schemeClr val="accent1"/>
-          </a:fillRef>
-          <a:effectRef idx="2">
-            <a:schemeClr val="accent1"/>
-          </a:effectRef>
-          <a:fontRef idx="minor">
-            <a:schemeClr val="lt1"/>
-          </a:fontRef>
-        </p:style>
-        <p:txBody>
-          <a:bodyPr rtlCol="0" anchor="ctr"/>
-          <a:lstStyle/>
-          <a:p>
-            <a:pPr algn="ctr"/>
-          </a:p>
-        </p:txBody>
-      </p:sp>
-      <p:sp>
-        <p:nvSpPr>
-          <p:cNvPr id="8" name="TextBox 7"/>
-          <p:cNvSpPr txBox="1"/>
-          <p:nvPr/>
-        </p:nvSpPr>
-        <p:spPr>
-          <a:xfrm>
-            <a:off x="8667750" y="11239500"/>
-            <a:ext cx="857250" cy="857250"/>
+        </p:nvPicPr>
+        <p:blipFill>
+          <a:blip r:embed="rId3"/>
+          <a:stretch>
+            <a:fillRect/>
+          </a:stretch>
+        </p:blipFill>
+        <p:spPr>
+          <a:xfrm>
+            <a:off x="8571501" y="11239500"/>
+            <a:ext cx="953498" cy="857250"/>
           </a:xfrm>
           <a:prstGeom prst="rect">
             <a:avLst/>
           </a:prstGeom>
-          <a:noFill/>
-        </p:spPr>
-        <p:txBody>
-          <a:bodyPr wrap="square" lIns="0" rIns="0" tIns="0" bIns="0" anchor="ctr">
-            <a:spAutoFit/>
-          </a:bodyPr>
-          <a:lstStyle/>
-          <a:p>
-            <a:pPr algn="ctr">
-              <a:lnSpc>
-                <a:spcPct val="120000"/>
-              </a:lnSpc>
-            </a:pPr>
-            <a:r>
-              <a:rPr sz="1800" b="1" i="0">
-                <a:solidFill>
-                  <a:srgbClr val="22371F"/>
-                </a:solidFill>
-                <a:latin typeface="Montserrat"/>
-              </a:rPr>
-              <a:t>LOGO</a:t>
-            </a:r>
-          </a:p>
-        </p:txBody>
-      </p:sp>
-      <p:sp>
-        <p:nvSpPr>
-          <p:cNvPr id="9" name="TextBox 8"/>
+        </p:spPr>
+      </p:pic>
+      <p:sp>
+        <p:nvSpPr>
+          <p:cNvPr id="8" name="TextBox 7"/>
           <p:cNvSpPr txBox="1"/>
           <p:nvPr/>
         </p:nvSpPr>

--- a/templates/posts/october/2026-10-01-thu-ig-boubacar.pptx
+++ b/templates/posts/october/2026-10-01-thu-ig-boubacar.pptx
@@ -3859,7 +3859,7 @@
     <p:bg>
       <p:bgPr>
         <a:solidFill>
-          <a:srgbClr val="22371F"/>
+          <a:srgbClr val="1E3F1D"/>
         </a:solidFill>
         <a:effectLst/>
       </p:bgPr>
@@ -3971,12 +3971,12 @@
           <a:gradFill rotWithShape="1">
             <a:gsLst>
               <a:gs pos="0">
-                <a:srgbClr val="22371F">
+                <a:srgbClr val="1E3F1D">
                   <a:alpha val="0"/>
                 </a:srgbClr>
               </a:gs>
               <a:gs pos="100000">
-                <a:srgbClr val="22371F">
+                <a:srgbClr val="1E3F1D">
                   <a:alpha val="85000"/>
                 </a:srgbClr>
               </a:gs>
@@ -4027,7 +4027,7 @@
             </a:avLst>
           </a:prstGeom>
           <a:solidFill>
-            <a:srgbClr val="22371F">
+            <a:srgbClr val="1E3F1D">
               <a:alpha val="80000"/>
             </a:srgbClr>
           </a:solidFill>
@@ -4088,7 +4088,7 @@
             <a:r>
               <a:rPr sz="2200" b="1" i="0" spc="200">
                 <a:solidFill>
-                  <a:srgbClr val="DBE6A7"/>
+                  <a:srgbClr val="B1BCB1"/>
                 </a:solidFill>
                 <a:latin typeface="Montserrat"/>
               </a:rPr>
@@ -4112,7 +4112,7 @@
             <a:avLst/>
           </a:prstGeom>
           <a:solidFill>
-            <a:srgbClr val="59A66C"/>
+            <a:srgbClr val="B1BCB1"/>
           </a:solidFill>
           <a:ln>
             <a:noFill/>
@@ -4171,7 +4171,7 @@
             <a:r>
               <a:rPr sz="6400" b="1" i="0">
                 <a:solidFill>
-                  <a:srgbClr val="F4F1EA"/>
+                  <a:srgbClr val="F3F1EA"/>
                 </a:solidFill>
                 <a:latin typeface="Montserrat"/>
               </a:rPr>
@@ -4210,7 +4210,7 @@
             <a:r>
               <a:rPr sz="3000" b="0" i="0">
                 <a:solidFill>
-                  <a:srgbClr val="DBE6A7"/>
+                  <a:srgbClr val="B1BCB1"/>
                 </a:solidFill>
                 <a:latin typeface="Source Sans 3"/>
               </a:rPr>
@@ -4273,7 +4273,7 @@
             <a:r>
               <a:rPr sz="2000" b="0" i="0">
                 <a:solidFill>
-                  <a:srgbClr val="F4F1EA">
+                  <a:srgbClr val="F3F1EA">
                     <a:alpha val="60000"/>
                   </a:srgbClr>
                 </a:solidFill>
@@ -4298,7 +4298,7 @@
     <p:bg>
       <p:bgPr>
         <a:solidFill>
-          <a:srgbClr val="F4F1EA"/>
+          <a:srgbClr val="F3F1EA"/>
         </a:solidFill>
         <a:effectLst/>
       </p:bgPr>
@@ -4340,7 +4340,7 @@
             <a:r>
               <a:rPr sz="26000" b="1" i="0">
                 <a:solidFill>
-                  <a:srgbClr val="156826">
+                  <a:srgbClr val="31662F">
                     <a:alpha val="30000"/>
                   </a:srgbClr>
                 </a:solidFill>
@@ -4381,7 +4381,7 @@
             <a:r>
               <a:rPr sz="4800" b="1" i="0">
                 <a:solidFill>
-                  <a:srgbClr val="22371F"/>
+                  <a:srgbClr val="1E3F1D"/>
                 </a:solidFill>
                 <a:latin typeface="Montserrat"/>
               </a:rPr>
@@ -4420,7 +4420,7 @@
             <a:r>
               <a:rPr sz="2600" b="0" i="0">
                 <a:solidFill>
-                  <a:srgbClr val="156826"/>
+                  <a:srgbClr val="31662F"/>
                 </a:solidFill>
                 <a:latin typeface="Source Sans 3"/>
               </a:rPr>
@@ -4484,7 +4484,7 @@
     <p:bg>
       <p:bgPr>
         <a:solidFill>
-          <a:srgbClr val="F4F1EA"/>
+          <a:srgbClr val="F3F1EA"/>
         </a:solidFill>
         <a:effectLst/>
       </p:bgPr>
@@ -4609,7 +4609,7 @@
             <a:r>
               <a:rPr sz="2000" b="1" i="0" spc="200">
                 <a:solidFill>
-                  <a:srgbClr val="156826"/>
+                  <a:srgbClr val="31662F"/>
                 </a:solidFill>
                 <a:latin typeface="Montserrat"/>
               </a:rPr>
@@ -4648,7 +4648,7 @@
             <a:r>
               <a:rPr sz="3800" b="0" i="0">
                 <a:solidFill>
-                  <a:srgbClr val="22371F"/>
+                  <a:srgbClr val="1E3F1D"/>
                 </a:solidFill>
                 <a:latin typeface="Source Sans 3"/>
               </a:rPr>
@@ -4712,7 +4712,7 @@
     <p:bg>
       <p:bgPr>
         <a:solidFill>
-          <a:srgbClr val="F4F1EA"/>
+          <a:srgbClr val="F3F1EA"/>
         </a:solidFill>
         <a:effectLst/>
       </p:bgPr>
@@ -4837,7 +4837,7 @@
             <a:r>
               <a:rPr sz="2000" b="1" i="0" spc="200">
                 <a:solidFill>
-                  <a:srgbClr val="156826"/>
+                  <a:srgbClr val="31662F"/>
                 </a:solidFill>
                 <a:latin typeface="Montserrat"/>
               </a:rPr>
@@ -4876,7 +4876,7 @@
             <a:r>
               <a:rPr sz="3800" b="0" i="0">
                 <a:solidFill>
-                  <a:srgbClr val="22371F"/>
+                  <a:srgbClr val="1E3F1D"/>
                 </a:solidFill>
                 <a:latin typeface="Source Sans 3"/>
               </a:rPr>
@@ -4940,7 +4940,7 @@
     <p:bg>
       <p:bgPr>
         <a:solidFill>
-          <a:srgbClr val="F4F1EA"/>
+          <a:srgbClr val="F3F1EA"/>
         </a:solidFill>
         <a:effectLst/>
       </p:bgPr>
@@ -5065,7 +5065,7 @@
             <a:r>
               <a:rPr sz="2000" b="1" i="0" spc="200">
                 <a:solidFill>
-                  <a:srgbClr val="156826"/>
+                  <a:srgbClr val="31662F"/>
                 </a:solidFill>
                 <a:latin typeface="Montserrat"/>
               </a:rPr>
@@ -5104,7 +5104,7 @@
             <a:r>
               <a:rPr sz="3800" b="0" i="0">
                 <a:solidFill>
-                  <a:srgbClr val="22371F"/>
+                  <a:srgbClr val="1E3F1D"/>
                 </a:solidFill>
                 <a:latin typeface="Source Sans 3"/>
               </a:rPr>
@@ -5168,7 +5168,7 @@
     <p:bg>
       <p:bgPr>
         <a:solidFill>
-          <a:srgbClr val="F4F1EA"/>
+          <a:srgbClr val="F3F1EA"/>
         </a:solidFill>
         <a:effectLst/>
       </p:bgPr>
@@ -5210,7 +5210,7 @@
             <a:r>
               <a:rPr sz="26000" b="1" i="0">
                 <a:solidFill>
-                  <a:srgbClr val="156826">
+                  <a:srgbClr val="31662F">
                     <a:alpha val="30000"/>
                   </a:srgbClr>
                 </a:solidFill>
@@ -5251,7 +5251,7 @@
             <a:r>
               <a:rPr sz="4800" b="1" i="0">
                 <a:solidFill>
-                  <a:srgbClr val="22371F"/>
+                  <a:srgbClr val="1E3F1D"/>
                 </a:solidFill>
                 <a:latin typeface="Montserrat"/>
               </a:rPr>
@@ -5290,7 +5290,7 @@
             <a:r>
               <a:rPr sz="2600" b="0" i="0">
                 <a:solidFill>
-                  <a:srgbClr val="156826"/>
+                  <a:srgbClr val="31662F"/>
                 </a:solidFill>
                 <a:latin typeface="Source Sans 3"/>
               </a:rPr>
@@ -5316,7 +5316,7 @@
             </a:avLst>
           </a:prstGeom>
           <a:solidFill>
-            <a:srgbClr val="156826"/>
+            <a:srgbClr val="31662F"/>
           </a:solidFill>
           <a:ln>
             <a:noFill/>
@@ -5375,7 +5375,7 @@
             <a:r>
               <a:rPr sz="2800" b="1" i="0">
                 <a:solidFill>
-                  <a:srgbClr val="F4F1EA"/>
+                  <a:srgbClr val="F3F1EA"/>
                 </a:solidFill>
                 <a:latin typeface="Montserrat"/>
               </a:rPr>
